--- a/02-discovery/competitive-and-journey-map.pptx
+++ b/02-discovery/competitive-and-journey-map.pptx
@@ -293,8 +293,7 @@
           <a:lstStyle/>
           <a:p>
             <a:r>
-              <a:rPr lang="en-US" dirty="0"/>
-              <a:t>Five manual steps at shift close. The low point is step 4: the coordinator re-types data RouteLogic already holds, because live updates arrived by WhatsApp and text. Evidence: WhatsApp-as-real-system quote, 20-60 min board lag, 14.6 min compliance step, 6.8 min/day handoff saving. Opportunity mapping: B6, sync fix, B1, B2 (under test), B3.</a:t>
+              <a:t>Coordinator shift close, 5 manual steps. Worst one is step 4 where they re-type stuff RouteLogic already has, because the live updates came in on WhatsApp and texts. Evidence - WhatsApp as the real system quote, 20-60 min board lag, 14.6 min compliance step, ~6.8 min a day saved on handoff. Opportunities - B6, sync fix, B1, B2 (the one we're testing), B3.</a:t>
             </a:r>
           </a:p>
         </p:txBody>
@@ -380,8 +379,7 @@
           <a:lstStyle/>
           <a:p>
             <a:r>
-              <a:rPr lang="en-US" dirty="0"/>
-              <a:t>RouteLogic wins on admin and reporting, loses on frontline speed and sync. The lean competitor is unnamed in the research; its reporting depth is a gap to fill. The workaround stack is fast but creates the re-keying at shift end, which is exactly what B2 removes.</a:t>
+              <a:t>RouteLogic wins on admin/reporting and loses on frontline speed and sync. Competitor isnt named in the research so we dont know their reporting depth yet. WhatsApp etc is fast but creates the re-keying at the end of the shift, which is what B2 gets rid of.</a:t>
             </a:r>
           </a:p>
         </p:txBody>
